--- a/RL/02 - Deep Reinforcement Learning/02 - 05 PG-PPO/Presentation/PPO.pptx
+++ b/RL/02 - Deep Reinforcement Learning/02 - 05 PG-PPO/Presentation/PPO.pptx
@@ -14264,8 +14264,8 @@
             </p:nvSpPr>
             <p:spPr>
               <a:xfrm>
-                <a:off x="233203" y="1067823"/>
-                <a:ext cx="8787947" cy="3676011"/>
+                <a:off x="233203" y="1494027"/>
+                <a:ext cx="8787947" cy="2760258"/>
               </a:xfrm>
             </p:spPr>
             <p:txBody>
@@ -14634,8 +14634,8 @@
             </p:nvSpPr>
             <p:spPr>
               <a:xfrm>
-                <a:off x="233203" y="1067823"/>
-                <a:ext cx="8787947" cy="3676011"/>
+                <a:off x="233203" y="1494027"/>
+                <a:ext cx="8787947" cy="2760258"/>
               </a:xfrm>
               <a:blipFill>
                 <a:blip r:embed="rId3"/>
@@ -20888,7 +20888,7 @@
                 <a:cs typeface="Roboto"/>
                 <a:sym typeface="Roboto"/>
               </a:rPr>
-              <a:t>6</a:t>
+              <a:t>9</a:t>
             </a:r>
             <a:endParaRPr sz="1500" dirty="0">
               <a:latin typeface="Roboto"/>
@@ -21795,7 +21795,7 @@
         </p:nvSpPr>
         <p:spPr>
           <a:xfrm>
-            <a:off x="3215846" y="2231977"/>
+            <a:off x="3082400" y="2278050"/>
             <a:ext cx="3864600" cy="587400"/>
           </a:xfrm>
           <a:prstGeom prst="rect">
@@ -21840,7 +21840,7 @@
         <p:spPr>
           <a:xfrm>
             <a:off x="500550" y="1575703"/>
-            <a:ext cx="3105337" cy="307777"/>
+            <a:ext cx="2877711" cy="307777"/>
           </a:xfrm>
           <a:prstGeom prst="rect">
             <a:avLst/>
@@ -21860,7 +21860,7 @@
                 </a:solidFill>
                 <a:latin typeface="Google Sans"/>
               </a:rPr>
-              <a:t>01</a:t>
+              <a:t>06</a:t>
             </a:r>
             <a:r>
               <a:rPr lang="ru-RU" dirty="0">
@@ -21869,7 +21869,7 @@
                 </a:solidFill>
                 <a:latin typeface="Google Sans"/>
               </a:rPr>
-              <a:t>.0</a:t>
+              <a:t>.</a:t>
             </a:r>
             <a:r>
               <a:rPr lang="en-US" dirty="0">
@@ -21878,7 +21878,7 @@
                 </a:solidFill>
                 <a:latin typeface="Google Sans"/>
               </a:rPr>
-              <a:t>8</a:t>
+              <a:t>11</a:t>
             </a:r>
             <a:r>
               <a:rPr lang="ru-RU" dirty="0">
@@ -21887,7 +21887,7 @@
                 </a:solidFill>
                 <a:latin typeface="Google Sans"/>
               </a:rPr>
-              <a:t>.24 – </a:t>
+              <a:t> – </a:t>
             </a:r>
             <a:r>
               <a:rPr lang="en-GB" b="0" i="0" u="none" strike="noStrike" dirty="0">
@@ -24559,186 +24559,6 @@
           </a:graphicData>
         </a:graphic>
       </p:graphicFrame>
-      <p:sp>
-        <p:nvSpPr>
-          <p:cNvPr id="26" name="TextBox 25">
-            <a:extLst>
-              <a:ext uri="{FF2B5EF4-FFF2-40B4-BE49-F238E27FC236}">
-                <a16:creationId xmlns:a16="http://schemas.microsoft.com/office/drawing/2014/main" id="{931A30D8-5675-B440-B54C-21D6D109A2DB}"/>
-              </a:ext>
-            </a:extLst>
-          </p:cNvPr>
-          <p:cNvSpPr txBox="1"/>
-          <p:nvPr/>
-        </p:nvSpPr>
-        <p:spPr>
-          <a:xfrm>
-            <a:off x="1154981" y="1975086"/>
-            <a:ext cx="689612" cy="307777"/>
-          </a:xfrm>
-          <a:prstGeom prst="rect">
-            <a:avLst/>
-          </a:prstGeom>
-          <a:noFill/>
-        </p:spPr>
-        <p:txBody>
-          <a:bodyPr wrap="none" rtlCol="0">
-            <a:spAutoFit/>
-          </a:bodyPr>
-          <a:lstStyle/>
-          <a:p>
-            <a:r>
-              <a:rPr lang="en-US" dirty="0">
-                <a:latin typeface="AkayaTelivigala" pitchFamily="2" charset="77"/>
-                <a:cs typeface="AkayaTelivigala" pitchFamily="2" charset="77"/>
-              </a:rPr>
-              <a:t>16.07 -</a:t>
-            </a:r>
-          </a:p>
-        </p:txBody>
-      </p:sp>
-      <p:sp>
-        <p:nvSpPr>
-          <p:cNvPr id="27" name="TextBox 26">
-            <a:extLst>
-              <a:ext uri="{FF2B5EF4-FFF2-40B4-BE49-F238E27FC236}">
-                <a16:creationId xmlns:a16="http://schemas.microsoft.com/office/drawing/2014/main" id="{30EA6FA9-EA02-9B43-B1F3-51DF6032BF05}"/>
-              </a:ext>
-            </a:extLst>
-          </p:cNvPr>
-          <p:cNvSpPr txBox="1"/>
-          <p:nvPr/>
-        </p:nvSpPr>
-        <p:spPr>
-          <a:xfrm>
-            <a:off x="1154981" y="2507396"/>
-            <a:ext cx="689612" cy="307777"/>
-          </a:xfrm>
-          <a:prstGeom prst="rect">
-            <a:avLst/>
-          </a:prstGeom>
-          <a:noFill/>
-        </p:spPr>
-        <p:txBody>
-          <a:bodyPr wrap="none" rtlCol="0">
-            <a:spAutoFit/>
-          </a:bodyPr>
-          <a:lstStyle/>
-          <a:p>
-            <a:r>
-              <a:rPr lang="en-US" dirty="0">
-                <a:latin typeface="AkayaTelivigala" pitchFamily="2" charset="77"/>
-                <a:cs typeface="AkayaTelivigala" pitchFamily="2" charset="77"/>
-              </a:rPr>
-              <a:t>19.07 -</a:t>
-            </a:r>
-          </a:p>
-        </p:txBody>
-      </p:sp>
-      <p:sp>
-        <p:nvSpPr>
-          <p:cNvPr id="28" name="TextBox 27">
-            <a:extLst>
-              <a:ext uri="{FF2B5EF4-FFF2-40B4-BE49-F238E27FC236}">
-                <a16:creationId xmlns:a16="http://schemas.microsoft.com/office/drawing/2014/main" id="{B8469429-E854-8246-BDDD-0E981D24B5F6}"/>
-              </a:ext>
-            </a:extLst>
-          </p:cNvPr>
-          <p:cNvSpPr txBox="1"/>
-          <p:nvPr/>
-        </p:nvSpPr>
-        <p:spPr>
-          <a:xfrm>
-            <a:off x="1159189" y="3035128"/>
-            <a:ext cx="684803" cy="307777"/>
-          </a:xfrm>
-          <a:prstGeom prst="rect">
-            <a:avLst/>
-          </a:prstGeom>
-          <a:noFill/>
-        </p:spPr>
-        <p:txBody>
-          <a:bodyPr wrap="none" rtlCol="0">
-            <a:spAutoFit/>
-          </a:bodyPr>
-          <a:lstStyle/>
-          <a:p>
-            <a:r>
-              <a:rPr lang="en-US" dirty="0">
-                <a:latin typeface="AkayaTelivigala" pitchFamily="2" charset="77"/>
-                <a:cs typeface="AkayaTelivigala" pitchFamily="2" charset="77"/>
-              </a:rPr>
-              <a:t>23.</a:t>
-            </a:r>
-            <a:r>
-              <a:rPr lang="ru-RU" dirty="0">
-                <a:latin typeface="AkayaTelivigala" pitchFamily="2" charset="77"/>
-                <a:cs typeface="AkayaTelivigala" pitchFamily="2" charset="77"/>
-              </a:rPr>
-              <a:t>0</a:t>
-            </a:r>
-            <a:r>
-              <a:rPr lang="en-US" dirty="0">
-                <a:latin typeface="AkayaTelivigala" pitchFamily="2" charset="77"/>
-                <a:cs typeface="AkayaTelivigala" pitchFamily="2" charset="77"/>
-              </a:rPr>
-              <a:t>7 -</a:t>
-            </a:r>
-          </a:p>
-        </p:txBody>
-      </p:sp>
-      <p:sp>
-        <p:nvSpPr>
-          <p:cNvPr id="29" name="TextBox 28">
-            <a:extLst>
-              <a:ext uri="{FF2B5EF4-FFF2-40B4-BE49-F238E27FC236}">
-                <a16:creationId xmlns:a16="http://schemas.microsoft.com/office/drawing/2014/main" id="{D148335E-DE4C-9F4D-8D84-C8ABEBCDC383}"/>
-              </a:ext>
-            </a:extLst>
-          </p:cNvPr>
-          <p:cNvSpPr txBox="1"/>
-          <p:nvPr/>
-        </p:nvSpPr>
-        <p:spPr>
-          <a:xfrm>
-            <a:off x="1149571" y="3572582"/>
-            <a:ext cx="694421" cy="307777"/>
-          </a:xfrm>
-          <a:prstGeom prst="rect">
-            <a:avLst/>
-          </a:prstGeom>
-          <a:noFill/>
-        </p:spPr>
-        <p:txBody>
-          <a:bodyPr wrap="none" rtlCol="0">
-            <a:spAutoFit/>
-          </a:bodyPr>
-          <a:lstStyle/>
-          <a:p>
-            <a:r>
-              <a:rPr lang="en-US" dirty="0">
-                <a:latin typeface="AkayaTelivigala" pitchFamily="2" charset="77"/>
-                <a:cs typeface="AkayaTelivigala" pitchFamily="2" charset="77"/>
-              </a:rPr>
-              <a:t>26.</a:t>
-            </a:r>
-            <a:r>
-              <a:rPr lang="ru-RU" dirty="0">
-                <a:latin typeface="AkayaTelivigala" pitchFamily="2" charset="77"/>
-                <a:cs typeface="AkayaTelivigala" pitchFamily="2" charset="77"/>
-              </a:rPr>
-              <a:t>0</a:t>
-            </a:r>
-            <a:r>
-              <a:rPr lang="en-US" dirty="0">
-                <a:latin typeface="AkayaTelivigala" pitchFamily="2" charset="77"/>
-                <a:cs typeface="AkayaTelivigala" pitchFamily="2" charset="77"/>
-              </a:rPr>
-              <a:t>7 -</a:t>
-            </a:r>
-          </a:p>
-        </p:txBody>
-      </p:sp>
       <p:pic>
         <p:nvPicPr>
           <p:cNvPr id="31" name="Google Shape;530;p82">
@@ -25125,110 +24945,6 @@
           </a:fontRef>
         </p:style>
       </p:cxnSp>
-      <p:sp>
-        <p:nvSpPr>
-          <p:cNvPr id="39" name="TextBox 38">
-            <a:extLst>
-              <a:ext uri="{FF2B5EF4-FFF2-40B4-BE49-F238E27FC236}">
-                <a16:creationId xmlns:a16="http://schemas.microsoft.com/office/drawing/2014/main" id="{F174CB2D-C2B2-E141-83F7-704E46E87B04}"/>
-              </a:ext>
-            </a:extLst>
-          </p:cNvPr>
-          <p:cNvSpPr txBox="1"/>
-          <p:nvPr/>
-        </p:nvSpPr>
-        <p:spPr>
-          <a:xfrm>
-            <a:off x="1149571" y="4093222"/>
-            <a:ext cx="689612" cy="307777"/>
-          </a:xfrm>
-          <a:prstGeom prst="rect">
-            <a:avLst/>
-          </a:prstGeom>
-          <a:noFill/>
-        </p:spPr>
-        <p:txBody>
-          <a:bodyPr wrap="none" rtlCol="0">
-            <a:spAutoFit/>
-          </a:bodyPr>
-          <a:lstStyle/>
-          <a:p>
-            <a:r>
-              <a:rPr lang="en-US" dirty="0">
-                <a:latin typeface="AkayaTelivigala" pitchFamily="2" charset="77"/>
-                <a:cs typeface="AkayaTelivigala" pitchFamily="2" charset="77"/>
-              </a:rPr>
-              <a:t>30.</a:t>
-            </a:r>
-            <a:r>
-              <a:rPr lang="ru-RU" dirty="0">
-                <a:latin typeface="AkayaTelivigala" pitchFamily="2" charset="77"/>
-                <a:cs typeface="AkayaTelivigala" pitchFamily="2" charset="77"/>
-              </a:rPr>
-              <a:t>0</a:t>
-            </a:r>
-            <a:r>
-              <a:rPr lang="en-US" dirty="0">
-                <a:latin typeface="AkayaTelivigala" pitchFamily="2" charset="77"/>
-                <a:cs typeface="AkayaTelivigala" pitchFamily="2" charset="77"/>
-              </a:rPr>
-              <a:t>7 -</a:t>
-            </a:r>
-          </a:p>
-        </p:txBody>
-      </p:sp>
-      <p:sp>
-        <p:nvSpPr>
-          <p:cNvPr id="41" name="TextBox 40">
-            <a:extLst>
-              <a:ext uri="{FF2B5EF4-FFF2-40B4-BE49-F238E27FC236}">
-                <a16:creationId xmlns:a16="http://schemas.microsoft.com/office/drawing/2014/main" id="{92D8141E-46A4-A04D-9B29-35ACB9D91FC0}"/>
-              </a:ext>
-            </a:extLst>
-          </p:cNvPr>
-          <p:cNvSpPr txBox="1"/>
-          <p:nvPr/>
-        </p:nvSpPr>
-        <p:spPr>
-          <a:xfrm>
-            <a:off x="1140085" y="4613862"/>
-            <a:ext cx="708848" cy="307777"/>
-          </a:xfrm>
-          <a:prstGeom prst="rect">
-            <a:avLst/>
-          </a:prstGeom>
-          <a:noFill/>
-        </p:spPr>
-        <p:txBody>
-          <a:bodyPr wrap="none" rtlCol="0">
-            <a:spAutoFit/>
-          </a:bodyPr>
-          <a:lstStyle/>
-          <a:p>
-            <a:r>
-              <a:rPr lang="en-US" dirty="0">
-                <a:latin typeface="AkayaTelivigala" pitchFamily="2" charset="77"/>
-                <a:cs typeface="AkayaTelivigala" pitchFamily="2" charset="77"/>
-              </a:rPr>
-              <a:t>01.</a:t>
-            </a:r>
-            <a:r>
-              <a:rPr lang="ru-RU" dirty="0">
-                <a:latin typeface="AkayaTelivigala" pitchFamily="2" charset="77"/>
-                <a:cs typeface="AkayaTelivigala" pitchFamily="2" charset="77"/>
-              </a:rPr>
-              <a:t>0</a:t>
-            </a:r>
-            <a:r>
-              <a:rPr lang="en-US" dirty="0">
-                <a:latin typeface="AkayaTelivigala" pitchFamily="2" charset="77"/>
-                <a:cs typeface="AkayaTelivigala" pitchFamily="2" charset="77"/>
-              </a:rPr>
-              <a:t>8 -</a:t>
-            </a:r>
-          </a:p>
-        </p:txBody>
-      </p:sp>
     </p:spTree>
     <p:extLst>
       <p:ext uri="{BB962C8B-B14F-4D97-AF65-F5344CB8AC3E}">

--- a/RL/02 - Deep Reinforcement Learning/02 - 05 PG-PPO/Presentation/PPO.pptx
+++ b/RL/02 - Deep Reinforcement Learning/02 - 05 PG-PPO/Presentation/PPO.pptx
@@ -14244,8 +14244,8 @@
           </a:p>
         </p:txBody>
       </p:sp>
-      <mc:AlternateContent xmlns:mc="http://schemas.openxmlformats.org/markup-compatibility/2006">
-        <mc:Choice xmlns:a14="http://schemas.microsoft.com/office/drawing/2010/main" Requires="a14">
+      <mc:AlternateContent xmlns:mc="http://schemas.openxmlformats.org/markup-compatibility/2006" xmlns:a14="http://schemas.microsoft.com/office/drawing/2010/main">
+        <mc:Choice Requires="a14">
           <p:sp>
             <p:nvSpPr>
               <p:cNvPr id="3" name="Text Placeholder 2">
@@ -14615,7 +14615,7 @@
             </p:txBody>
           </p:sp>
         </mc:Choice>
-        <mc:Fallback>
+        <mc:Fallback xmlns="">
           <p:sp>
             <p:nvSpPr>
               <p:cNvPr id="3" name="Text Placeholder 2">
@@ -20759,7 +20759,7 @@
         <p:spPr>
           <a:xfrm>
             <a:off x="1654525" y="2049300"/>
-            <a:ext cx="2475300" cy="877200"/>
+            <a:ext cx="2475300" cy="646300"/>
           </a:xfrm>
           <a:prstGeom prst="rect">
             <a:avLst/>
@@ -20817,78 +20817,7 @@
                 <a:cs typeface="Roboto"/>
                 <a:sym typeface="Roboto"/>
               </a:rPr>
-              <a:t>в учебной группе </a:t>
-            </a:r>
-            <a:endParaRPr sz="1500" dirty="0">
-              <a:latin typeface="Roboto"/>
-              <a:ea typeface="Roboto"/>
-              <a:cs typeface="Roboto"/>
-              <a:sym typeface="Roboto"/>
-            </a:endParaRPr>
-          </a:p>
-          <a:p>
-            <a:pPr marL="0" lvl="0" indent="0" algn="l" rtl="0">
-              <a:spcBef>
-                <a:spcPts val="0"/>
-              </a:spcBef>
-              <a:spcAft>
-                <a:spcPts val="0"/>
-              </a:spcAft>
-              <a:buNone/>
-            </a:pPr>
-            <a:r>
-              <a:rPr lang="ru" sz="1500" dirty="0">
-                <a:latin typeface="Roboto"/>
-                <a:ea typeface="Roboto"/>
-                <a:cs typeface="Roboto"/>
-                <a:sym typeface="Roboto"/>
-              </a:rPr>
-              <a:t>#</a:t>
-            </a:r>
-            <a:r>
-              <a:rPr lang="en-US" sz="1500" b="1" dirty="0">
-                <a:latin typeface="Roboto"/>
-                <a:ea typeface="Roboto"/>
-                <a:cs typeface="Roboto"/>
-                <a:sym typeface="Roboto"/>
-              </a:rPr>
-              <a:t>RL-202</a:t>
-            </a:r>
-            <a:r>
-              <a:rPr lang="ru-RU" sz="1500" b="1" dirty="0">
-                <a:latin typeface="Roboto"/>
-                <a:ea typeface="Roboto"/>
-                <a:cs typeface="Roboto"/>
-                <a:sym typeface="Roboto"/>
-              </a:rPr>
-              <a:t>4</a:t>
-            </a:r>
-            <a:r>
-              <a:rPr lang="en-US" sz="1500" b="1" dirty="0">
-                <a:latin typeface="Roboto"/>
-                <a:ea typeface="Roboto"/>
-                <a:cs typeface="Roboto"/>
-                <a:sym typeface="Roboto"/>
-              </a:rPr>
-              <a:t>-</a:t>
-            </a:r>
-            <a:r>
-              <a:rPr lang="ru-RU" sz="1500" b="1" dirty="0">
-                <a:latin typeface="Roboto"/>
-                <a:ea typeface="Roboto"/>
-                <a:cs typeface="Roboto"/>
-                <a:sym typeface="Roboto"/>
-              </a:rPr>
-              <a:t>0</a:t>
-            </a:r>
-            <a:r>
-              <a:rPr lang="en-US" sz="1500" b="1" dirty="0">
-                <a:latin typeface="Roboto"/>
-                <a:ea typeface="Roboto"/>
-                <a:cs typeface="Roboto"/>
-                <a:sym typeface="Roboto"/>
-              </a:rPr>
-              <a:t>9</a:t>
+              <a:t>в учебной группе</a:t>
             </a:r>
             <a:endParaRPr sz="1500" dirty="0">
               <a:latin typeface="Roboto"/>

--- a/RL/02 - Deep Reinforcement Learning/02 - 05 PG-PPO/Presentation/PPO.pptx
+++ b/RL/02 - Deep Reinforcement Learning/02 - 05 PG-PPO/Presentation/PPO.pptx
@@ -21769,7 +21769,7 @@
         <p:spPr>
           <a:xfrm>
             <a:off x="500550" y="1575703"/>
-            <a:ext cx="2877711" cy="307777"/>
+            <a:ext cx="2297424" cy="307777"/>
           </a:xfrm>
           <a:prstGeom prst="rect">
             <a:avLst/>
@@ -21782,42 +21782,6 @@
           </a:bodyPr>
           <a:lstStyle/>
           <a:p>
-            <a:r>
-              <a:rPr lang="en-US" dirty="0">
-                <a:solidFill>
-                  <a:srgbClr val="1F1F1F"/>
-                </a:solidFill>
-                <a:latin typeface="Google Sans"/>
-              </a:rPr>
-              <a:t>06</a:t>
-            </a:r>
-            <a:r>
-              <a:rPr lang="ru-RU" dirty="0">
-                <a:solidFill>
-                  <a:srgbClr val="1F1F1F"/>
-                </a:solidFill>
-                <a:latin typeface="Google Sans"/>
-              </a:rPr>
-              <a:t>.</a:t>
-            </a:r>
-            <a:r>
-              <a:rPr lang="en-US" dirty="0">
-                <a:solidFill>
-                  <a:srgbClr val="1F1F1F"/>
-                </a:solidFill>
-                <a:latin typeface="Google Sans"/>
-              </a:rPr>
-              <a:t>11</a:t>
-            </a:r>
-            <a:r>
-              <a:rPr lang="ru-RU" dirty="0">
-                <a:solidFill>
-                  <a:srgbClr val="1F1F1F"/>
-                </a:solidFill>
-                <a:latin typeface="Google Sans"/>
-              </a:rPr>
-              <a:t> – </a:t>
-            </a:r>
             <a:r>
               <a:rPr lang="en-GB" b="0" i="0" u="none" strike="noStrike" dirty="0">
                 <a:solidFill>
